--- a/RA4 - Seguretat en xarxa/AA2 - Inventari i monitoritzacio/RA4_AA2_Inventari_Monitoritzacio.pptx
+++ b/RA4 - Seguretat en xarxa/AA2 - Inventari i monitoritzacio/RA4_AA2_Inventari_Monitoritzacio.pptx
@@ -1962,6 +1962,10 @@
           </a:solidFill>
           <a:ln/>
         </p:spPr>
+        <p:txBody>
+          <a:bodyPr/>
+          <a:p/>
+        </p:txBody>
       </p:sp>
       <p:sp>
         <p:nvSpPr>
@@ -1982,6 +1986,10 @@
           </a:solidFill>
           <a:ln/>
         </p:spPr>
+        <p:txBody>
+          <a:bodyPr/>
+          <a:p/>
+        </p:txBody>
       </p:sp>
       <p:sp>
         <p:nvSpPr>
@@ -2395,6 +2403,10 @@
           </a:solidFill>
           <a:ln/>
         </p:spPr>
+        <p:txBody>
+          <a:bodyPr/>
+          <a:p/>
+        </p:txBody>
       </p:sp>
       <p:pic>
         <p:nvPicPr>
@@ -3364,6 +3376,10 @@
             </a:outerShdw>
           </a:effectLst>
         </p:spPr>
+        <p:txBody>
+          <a:bodyPr/>
+          <a:p/>
+        </p:txBody>
       </p:sp>
       <p:sp>
         <p:nvSpPr>
@@ -3384,6 +3400,10 @@
           </a:solidFill>
           <a:ln/>
         </p:spPr>
+        <p:txBody>
+          <a:bodyPr/>
+          <a:p/>
+        </p:txBody>
       </p:sp>
       <p:pic>
         <p:nvPicPr>
@@ -3523,6 +3543,10 @@
             </a:outerShdw>
           </a:effectLst>
         </p:spPr>
+        <p:txBody>
+          <a:bodyPr/>
+          <a:p/>
+        </p:txBody>
       </p:sp>
       <p:sp>
         <p:nvSpPr>
@@ -3543,6 +3567,10 @@
           </a:solidFill>
           <a:ln/>
         </p:spPr>
+        <p:txBody>
+          <a:bodyPr/>
+          <a:p/>
+        </p:txBody>
       </p:sp>
       <p:pic>
         <p:nvPicPr>
@@ -3682,6 +3710,10 @@
             </a:outerShdw>
           </a:effectLst>
         </p:spPr>
+        <p:txBody>
+          <a:bodyPr/>
+          <a:p/>
+        </p:txBody>
       </p:sp>
       <p:sp>
         <p:nvSpPr>
@@ -3702,6 +3734,10 @@
           </a:solidFill>
           <a:ln/>
         </p:spPr>
+        <p:txBody>
+          <a:bodyPr/>
+          <a:p/>
+        </p:txBody>
       </p:sp>
       <p:pic>
         <p:nvPicPr>
@@ -4625,7 +4661,7 @@
                 <a:ea typeface="Calibri" pitchFamily="34" charset="-122"/>
                 <a:cs typeface="Calibri" pitchFamily="34" charset="-120"/>
               </a:rPr>
-              <a:t>Llicència Creative Commons BY-NC-SA · Institut Obert de Catalunya, 2011 (materials adaptats i ampliats)</a:t>
+              <a:t>Llicència CC BY-SA 4.0 · Adaptat de "Materials" (SMX-0226SI), Carlos Alonso Martínez, Escola Pia de Mataró</a:t>
             </a:r>
             <a:endParaRPr lang="en-US" sz="1050" dirty="0"/>
           </a:p>
@@ -4852,6 +4888,10 @@
             </a:outerShdw>
           </a:effectLst>
         </p:spPr>
+        <p:txBody>
+          <a:bodyPr/>
+          <a:p/>
+        </p:txBody>
       </p:sp>
       <p:sp>
         <p:nvSpPr>
@@ -4872,6 +4912,10 @@
           </a:solidFill>
           <a:ln/>
         </p:spPr>
+        <p:txBody>
+          <a:bodyPr/>
+          <a:p/>
+        </p:txBody>
       </p:sp>
       <p:pic>
         <p:nvPicPr>
@@ -5011,6 +5055,10 @@
             </a:outerShdw>
           </a:effectLst>
         </p:spPr>
+        <p:txBody>
+          <a:bodyPr/>
+          <a:p/>
+        </p:txBody>
       </p:sp>
       <p:sp>
         <p:nvSpPr>
@@ -5031,6 +5079,10 @@
           </a:solidFill>
           <a:ln/>
         </p:spPr>
+        <p:txBody>
+          <a:bodyPr/>
+          <a:p/>
+        </p:txBody>
       </p:sp>
       <p:pic>
         <p:nvPicPr>
@@ -5170,6 +5222,10 @@
             </a:outerShdw>
           </a:effectLst>
         </p:spPr>
+        <p:txBody>
+          <a:bodyPr/>
+          <a:p/>
+        </p:txBody>
       </p:sp>
       <p:sp>
         <p:nvSpPr>
@@ -5190,6 +5246,10 @@
           </a:solidFill>
           <a:ln/>
         </p:spPr>
+        <p:txBody>
+          <a:bodyPr/>
+          <a:p/>
+        </p:txBody>
       </p:sp>
       <p:pic>
         <p:nvPicPr>
@@ -5813,6 +5873,10 @@
             </a:outerShdw>
           </a:effectLst>
         </p:spPr>
+        <p:txBody>
+          <a:bodyPr/>
+          <a:p/>
+        </p:txBody>
       </p:sp>
       <p:sp>
         <p:nvSpPr>
@@ -5833,6 +5897,10 @@
           </a:solidFill>
           <a:ln/>
         </p:spPr>
+        <p:txBody>
+          <a:bodyPr/>
+          <a:p/>
+        </p:txBody>
       </p:sp>
       <p:pic>
         <p:nvPicPr>
@@ -5972,6 +6040,10 @@
             </a:outerShdw>
           </a:effectLst>
         </p:spPr>
+        <p:txBody>
+          <a:bodyPr/>
+          <a:p/>
+        </p:txBody>
       </p:sp>
       <p:sp>
         <p:nvSpPr>
@@ -5992,6 +6064,10 @@
           </a:solidFill>
           <a:ln/>
         </p:spPr>
+        <p:txBody>
+          <a:bodyPr/>
+          <a:p/>
+        </p:txBody>
       </p:sp>
       <p:pic>
         <p:nvPicPr>
@@ -6119,6 +6195,10 @@
           </a:solidFill>
           <a:ln/>
         </p:spPr>
+        <p:txBody>
+          <a:bodyPr/>
+          <a:p/>
+        </p:txBody>
       </p:sp>
       <p:pic>
         <p:nvPicPr>
@@ -6402,6 +6482,10 @@
           </a:solidFill>
           <a:ln/>
         </p:spPr>
+        <p:txBody>
+          <a:bodyPr/>
+          <a:p/>
+        </p:txBody>
       </p:sp>
       <p:pic>
         <p:nvPicPr>
@@ -6697,6 +6781,10 @@
             </a:outerShdw>
           </a:effectLst>
         </p:spPr>
+        <p:txBody>
+          <a:bodyPr/>
+          <a:p/>
+        </p:txBody>
       </p:sp>
       <p:sp>
         <p:nvSpPr>
@@ -6717,6 +6805,10 @@
           </a:solidFill>
           <a:ln/>
         </p:spPr>
+        <p:txBody>
+          <a:bodyPr/>
+          <a:p/>
+        </p:txBody>
       </p:sp>
       <p:pic>
         <p:nvPicPr>
@@ -6856,6 +6948,10 @@
             </a:outerShdw>
           </a:effectLst>
         </p:spPr>
+        <p:txBody>
+          <a:bodyPr/>
+          <a:p/>
+        </p:txBody>
       </p:sp>
       <p:sp>
         <p:nvSpPr>
@@ -6876,6 +6972,10 @@
           </a:solidFill>
           <a:ln/>
         </p:spPr>
+        <p:txBody>
+          <a:bodyPr/>
+          <a:p/>
+        </p:txBody>
       </p:sp>
       <p:pic>
         <p:nvPicPr>
@@ -7246,6 +7346,10 @@
           </a:solidFill>
           <a:ln/>
         </p:spPr>
+        <p:txBody>
+          <a:bodyPr/>
+          <a:p/>
+        </p:txBody>
       </p:sp>
       <p:pic>
         <p:nvPicPr>
@@ -7529,6 +7633,10 @@
           </a:solidFill>
           <a:ln/>
         </p:spPr>
+        <p:txBody>
+          <a:bodyPr/>
+          <a:p/>
+        </p:txBody>
       </p:sp>
       <p:pic>
         <p:nvPicPr>
